--- a/Prezentacija.pptx
+++ b/Prezentacija.pptx
@@ -307,6 +307,11 @@
       </a:defRPr>
     </a:lvl9pPr>
   </p:defaultTextStyle>
+  <p:extLst>
+    <p:ext uri="{EFAFB233-063F-42B5-8137-9DF3F51BA10A}">
+      <p15:sldGuideLst xmlns:p15="http://schemas.microsoft.com/office/powerpoint/2012/main"/>
+    </p:ext>
+  </p:extLst>
 </p:presentation>
 </file>
 
@@ -33252,8 +33257,8 @@
         </p:nvSpPr>
         <p:spPr>
           <a:xfrm>
-            <a:off x="777240" y="1300240"/>
-            <a:ext cx="7589520" cy="2986972"/>
+            <a:off x="777240" y="1179659"/>
+            <a:ext cx="7589520" cy="3633302"/>
           </a:xfrm>
           <a:prstGeom prst="rect">
             <a:avLst/>
@@ -33288,7 +33293,29 @@
                 <a:ea typeface="Calibri"/>
                 <a:cs typeface="Calibri"/>
               </a:rPr>
-              <a:t>Комбинација – семантичка и епизодичка заједно (оса механизма екстракције):</a:t>
+              <a:t>Комбинација – семантичка и епизодичка заједно (оса </a:t>
+            </a:r>
+            <a:r>
+              <a:rPr lang="sr-Cyrl-RS" b="1">
+                <a:solidFill>
+                  <a:srgbClr val="5C5C5F"/>
+                </a:solidFill>
+                <a:latin typeface="Calibri"/>
+                <a:ea typeface="Calibri"/>
+                <a:cs typeface="Calibri"/>
+              </a:rPr>
+              <a:t>механизма екстракције</a:t>
+            </a:r>
+            <a:r>
+              <a:rPr lang="sr-Cyrl-RS">
+                <a:solidFill>
+                  <a:srgbClr val="5C5C5F"/>
+                </a:solidFill>
+                <a:latin typeface="Calibri"/>
+                <a:ea typeface="Calibri"/>
+                <a:cs typeface="Calibri"/>
+              </a:rPr>
+              <a:t>):</a:t>
             </a:r>
           </a:p>
           <a:p>
@@ -33334,7 +33361,29 @@
                 <a:ea typeface="Calibri"/>
                 <a:cs typeface="Calibri"/>
               </a:rPr>
-              <a:t>Појединачни типови (оса типа меморије, уз baseline):</a:t>
+              <a:t>Појединачни типови (оса</a:t>
+            </a:r>
+            <a:r>
+              <a:rPr lang="sr-Cyrl-RS" b="1">
+                <a:solidFill>
+                  <a:srgbClr val="5C5C5F"/>
+                </a:solidFill>
+                <a:latin typeface="Calibri"/>
+                <a:ea typeface="Calibri"/>
+                <a:cs typeface="Calibri"/>
+              </a:rPr>
+              <a:t> типа меморије</a:t>
+            </a:r>
+            <a:r>
+              <a:rPr lang="sr-Cyrl-RS">
+                <a:solidFill>
+                  <a:srgbClr val="5C5C5F"/>
+                </a:solidFill>
+                <a:latin typeface="Calibri"/>
+                <a:ea typeface="Calibri"/>
+                <a:cs typeface="Calibri"/>
+              </a:rPr>
+              <a:t>, уз baseline):</a:t>
             </a:r>
           </a:p>
           <a:p>
@@ -33438,7 +33487,7 @@
               <a:buChar char="o"/>
             </a:pPr>
             <a:r>
-              <a:rPr lang="sr-Cyrl-RS">
+              <a:rPr lang="sr-Cyrl-RS" b="1">
                 <a:solidFill>
                   <a:srgbClr val="5C5C5F"/>
                 </a:solidFill>
@@ -33446,7 +33495,211 @@
                 <a:ea typeface="Calibri"/>
                 <a:cs typeface="Calibri"/>
               </a:rPr>
-              <a:t>строга тачност прибављене меморије</a:t>
+              <a:t>строга тачност прибављене меморије </a:t>
+            </a:r>
+            <a:r>
+              <a:rPr lang="sr-Cyrl-RS">
+                <a:solidFill>
+                  <a:srgbClr val="5C5C5F"/>
+                </a:solidFill>
+                <a:latin typeface="Calibri"/>
+                <a:ea typeface="Calibri"/>
+                <a:cs typeface="Calibri"/>
+              </a:rPr>
+              <a:t>- </a:t>
+            </a:r>
+            <a:r>
+              <a:rPr lang="ru-RU">
+                <a:solidFill>
+                  <a:srgbClr val="5C5C5F"/>
+                </a:solidFill>
+                <a:latin typeface="Calibri"/>
+                <a:ea typeface="Calibri"/>
+                <a:cs typeface="Calibri"/>
+              </a:rPr>
+              <a:t>да ли агент у каснијим сесијама помиње оно што је научио</a:t>
+            </a:r>
+            <a:endParaRPr lang="sr-Cyrl-RS">
+              <a:solidFill>
+                <a:srgbClr val="5C5C5F"/>
+              </a:solidFill>
+              <a:latin typeface="Calibri"/>
+              <a:ea typeface="Calibri"/>
+              <a:cs typeface="Calibri"/>
+            </a:endParaRPr>
+          </a:p>
+          <a:p>
+            <a:pPr marL="548640" lvl="8" indent="-285750">
+              <a:buClr>
+                <a:srgbClr val="927C71"/>
+              </a:buClr>
+              <a:buFont typeface="Courier New" panose="02070309020205020404" pitchFamily="49" charset="0"/>
+              <a:buChar char="o"/>
+            </a:pPr>
+            <a:r>
+              <a:rPr lang="sr-Cyrl-RS" b="1">
+                <a:solidFill>
+                  <a:srgbClr val="5C5C5F"/>
+                </a:solidFill>
+                <a:latin typeface="Calibri"/>
+                <a:ea typeface="Calibri"/>
+                <a:cs typeface="Calibri"/>
+              </a:rPr>
+              <a:t>конзистентност кроз сесије </a:t>
+            </a:r>
+            <a:r>
+              <a:rPr lang="sr-Cyrl-RS">
+                <a:solidFill>
+                  <a:srgbClr val="5C5C5F"/>
+                </a:solidFill>
+                <a:latin typeface="Calibri"/>
+                <a:ea typeface="Calibri"/>
+                <a:cs typeface="Calibri"/>
+              </a:rPr>
+              <a:t>- </a:t>
+            </a:r>
+            <a:r>
+              <a:rPr lang="ru-RU">
+                <a:solidFill>
+                  <a:srgbClr val="5C5C5F"/>
+                </a:solidFill>
+                <a:latin typeface="Calibri"/>
+                <a:ea typeface="Calibri"/>
+                <a:cs typeface="Calibri"/>
+              </a:rPr>
+              <a:t>да ли се чињеница користи стабилно</a:t>
+            </a:r>
+            <a:endParaRPr lang="sr-Cyrl-RS">
+              <a:solidFill>
+                <a:srgbClr val="5C5C5F"/>
+              </a:solidFill>
+              <a:latin typeface="Calibri"/>
+              <a:ea typeface="Calibri"/>
+              <a:cs typeface="Calibri"/>
+            </a:endParaRPr>
+          </a:p>
+          <a:p>
+            <a:pPr marL="548640" lvl="8" indent="-285750">
+              <a:buClr>
+                <a:srgbClr val="927C71"/>
+              </a:buClr>
+              <a:buFont typeface="Courier New" panose="02070309020205020404" pitchFamily="49" charset="0"/>
+              <a:buChar char="o"/>
+            </a:pPr>
+            <a:r>
+              <a:rPr lang="sr-Cyrl-RS" b="1">
+                <a:solidFill>
+                  <a:srgbClr val="5C5C5F"/>
+                </a:solidFill>
+                <a:latin typeface="Calibri"/>
+                <a:ea typeface="Calibri"/>
+                <a:cs typeface="Calibri"/>
+              </a:rPr>
+              <a:t>лажно памћење</a:t>
+            </a:r>
+            <a:r>
+              <a:rPr lang="en-US" b="1">
+                <a:solidFill>
+                  <a:srgbClr val="5C5C5F"/>
+                </a:solidFill>
+                <a:latin typeface="Calibri"/>
+                <a:ea typeface="Calibri"/>
+                <a:cs typeface="Calibri"/>
+              </a:rPr>
+              <a:t> </a:t>
+            </a:r>
+            <a:r>
+              <a:rPr lang="en-US">
+                <a:solidFill>
+                  <a:srgbClr val="5C5C5F"/>
+                </a:solidFill>
+                <a:latin typeface="Calibri"/>
+                <a:ea typeface="Calibri"/>
+                <a:cs typeface="Calibri"/>
+              </a:rPr>
+              <a:t>- </a:t>
+            </a:r>
+            <a:r>
+              <a:rPr lang="sr-Cyrl-RS">
+                <a:solidFill>
+                  <a:srgbClr val="5C5C5F"/>
+                </a:solidFill>
+                <a:latin typeface="Calibri"/>
+                <a:ea typeface="Calibri"/>
+                <a:cs typeface="Calibri"/>
+              </a:rPr>
+              <a:t>ц</a:t>
+            </a:r>
+            <a:r>
+              <a:rPr lang="ru-RU">
+                <a:solidFill>
+                  <a:srgbClr val="5C5C5F"/>
+                </a:solidFill>
+                <a:latin typeface="Calibri"/>
+                <a:ea typeface="Calibri"/>
+                <a:cs typeface="Calibri"/>
+              </a:rPr>
+              <a:t>урење небитних или погрешних информација</a:t>
+            </a:r>
+            <a:endParaRPr lang="sr-Cyrl-RS">
+              <a:solidFill>
+                <a:srgbClr val="5C5C5F"/>
+              </a:solidFill>
+              <a:latin typeface="Calibri"/>
+              <a:ea typeface="Calibri"/>
+              <a:cs typeface="Calibri"/>
+            </a:endParaRPr>
+          </a:p>
+          <a:p>
+            <a:pPr marL="548640" lvl="8" indent="-285750">
+              <a:buClr>
+                <a:srgbClr val="927C71"/>
+              </a:buClr>
+              <a:buFont typeface="Courier New" panose="02070309020205020404" pitchFamily="49" charset="0"/>
+              <a:buChar char="o"/>
+            </a:pPr>
+            <a:r>
+              <a:rPr lang="sr-Cyrl-RS" b="1">
+                <a:solidFill>
+                  <a:srgbClr val="5C5C5F"/>
+                </a:solidFill>
+                <a:latin typeface="Calibri"/>
+                <a:ea typeface="Calibri"/>
+                <a:cs typeface="Calibri"/>
+              </a:rPr>
+              <a:t>тачност прибављања епизоде</a:t>
+            </a:r>
+            <a:r>
+              <a:rPr lang="en-US" b="1">
+                <a:solidFill>
+                  <a:srgbClr val="5C5C5F"/>
+                </a:solidFill>
+                <a:latin typeface="Calibri"/>
+                <a:ea typeface="Calibri"/>
+                <a:cs typeface="Calibri"/>
+              </a:rPr>
+              <a:t> </a:t>
+            </a:r>
+            <a:r>
+              <a:rPr lang="en-US">
+                <a:solidFill>
+                  <a:srgbClr val="5C5C5F"/>
+                </a:solidFill>
+                <a:latin typeface="Calibri"/>
+                <a:ea typeface="Calibri"/>
+                <a:cs typeface="Calibri"/>
+              </a:rPr>
+              <a:t>- </a:t>
+            </a:r>
+            <a:r>
+              <a:rPr lang="ru-RU" b="0" i="0">
+                <a:solidFill>
+                  <a:srgbClr val="616161"/>
+                </a:solidFill>
+                <a:effectLst/>
+                <a:latin typeface="-apple-system"/>
+              </a:rPr>
+              <a:t>удео потеза у којима прва прибављена епизода садржи очекивани детаљ из претходне сесије</a:t>
             </a:r>
           </a:p>
           <a:p>
@@ -33458,15 +33711,33 @@
               <a:buChar char="o"/>
             </a:pPr>
             <a:r>
-              <a:rPr lang="sr-Cyrl-RS">
-                <a:solidFill>
-                  <a:srgbClr val="5C5C5F"/>
-                </a:solidFill>
-                <a:latin typeface="Calibri"/>
-                <a:ea typeface="Calibri"/>
-                <a:cs typeface="Calibri"/>
+              <a:rPr lang="ru-RU" b="1">
+                <a:solidFill>
+                  <a:srgbClr val="616161"/>
+                </a:solidFill>
+                <a:latin typeface="-apple-system"/>
               </a:rPr>
-              <a:t>конзистентност кроз сесије</a:t>
+              <a:t>просечно време одговора</a:t>
+            </a:r>
+            <a:r>
+              <a:rPr lang="ru-RU" b="1" i="0">
+                <a:solidFill>
+                  <a:srgbClr val="616161"/>
+                </a:solidFill>
+                <a:effectLst/>
+                <a:latin typeface="-apple-system"/>
+              </a:rPr>
+              <a:t> </a:t>
+            </a:r>
+            <a:r>
+              <a:rPr lang="ru-RU" b="0" i="0">
+                <a:solidFill>
+                  <a:srgbClr val="616161"/>
+                </a:solidFill>
+                <a:effectLst/>
+                <a:latin typeface="-apple-system"/>
+              </a:rPr>
+              <a:t>– просечно време одговора по потезу</a:t>
             </a:r>
           </a:p>
           <a:p>
@@ -33478,7 +33749,7 @@
               <a:buChar char="o"/>
             </a:pPr>
             <a:r>
-              <a:rPr lang="sr-Cyrl-RS">
+              <a:rPr lang="sr-Cyrl-RS" b="1">
                 <a:solidFill>
                   <a:srgbClr val="5C5C5F"/>
                 </a:solidFill>
@@ -33486,19 +33757,10 @@
                 <a:ea typeface="Calibri"/>
                 <a:cs typeface="Calibri"/>
               </a:rPr>
-              <a:t>лажно памћење</a:t>
+              <a:t>кашњење у односу на baseline</a:t>
             </a:r>
-          </a:p>
-          <a:p>
-            <a:pPr marL="548640" lvl="8" indent="-285750">
-              <a:buClr>
-                <a:srgbClr val="927C71"/>
-              </a:buClr>
-              <a:buFont typeface="Courier New" panose="02070309020205020404" pitchFamily="49" charset="0"/>
-              <a:buChar char="o"/>
-            </a:pPr>
             <a:r>
-              <a:rPr lang="sr-Cyrl-RS">
+              <a:rPr lang="en-US" b="1">
                 <a:solidFill>
                   <a:srgbClr val="5C5C5F"/>
                 </a:solidFill>
@@ -33506,19 +33768,10 @@
                 <a:ea typeface="Calibri"/>
                 <a:cs typeface="Calibri"/>
               </a:rPr>
-              <a:t>тачност прибављања епизоде</a:t>
+              <a:t> </a:t>
             </a:r>
-          </a:p>
-          <a:p>
-            <a:pPr marL="548640" lvl="8" indent="-285750">
-              <a:buClr>
-                <a:srgbClr val="927C71"/>
-              </a:buClr>
-              <a:buFont typeface="Courier New" panose="02070309020205020404" pitchFamily="49" charset="0"/>
-              <a:buChar char="o"/>
-            </a:pPr>
             <a:r>
-              <a:rPr lang="sr-Cyrl-RS">
+              <a:rPr lang="en-US">
                 <a:solidFill>
                   <a:srgbClr val="5C5C5F"/>
                 </a:solidFill>
@@ -33526,7 +33779,18 @@
                 <a:ea typeface="Calibri"/>
                 <a:cs typeface="Calibri"/>
               </a:rPr>
-              <a:t>латенција и кашњење у односу на baseline</a:t>
+              <a:t>- </a:t>
+            </a:r>
+            <a:r>
+              <a:rPr lang="sr-Cyrl-RS">
+                <a:solidFill>
+                  <a:srgbClr val="5C5C5F"/>
+                </a:solidFill>
+                <a:latin typeface="Calibri"/>
+                <a:ea typeface="Calibri"/>
+                <a:cs typeface="Calibri"/>
+              </a:rPr>
+              <a:t>колико памћење успорава</a:t>
             </a:r>
           </a:p>
         </p:txBody>
@@ -47102,7 +47366,7 @@
         <p:spPr>
           <a:xfrm>
             <a:off x="777240" y="1540689"/>
-            <a:ext cx="7589520" cy="2379113"/>
+            <a:ext cx="7589520" cy="2748445"/>
           </a:xfrm>
           <a:prstGeom prst="rect">
             <a:avLst/>
@@ -47118,6 +47382,43 @@
             <a:pPr marL="210000" indent="-210000">
               <a:spcBef>
                 <a:spcPts val="0"/>
+              </a:spcBef>
+              <a:spcAft>
+                <a:spcPts val="0"/>
+              </a:spcAft>
+              <a:buClr>
+                <a:srgbClr val="927C71"/>
+              </a:buClr>
+              <a:buFont typeface="Arial"/>
+              <a:buChar char="•"/>
+            </a:pPr>
+            <a:r>
+              <a:rPr lang="en-US">
+                <a:solidFill>
+                  <a:srgbClr val="5C5C5F"/>
+                </a:solidFill>
+                <a:latin typeface="Calibri"/>
+                <a:ea typeface="Calibri"/>
+                <a:cs typeface="Calibri"/>
+              </a:rPr>
+              <a:t>LangMem SDK </a:t>
+            </a:r>
+            <a:r>
+              <a:rPr lang="sr-Cyrl-RS">
+                <a:solidFill>
+                  <a:srgbClr val="5C5C5F"/>
+                </a:solidFill>
+                <a:latin typeface="Calibri"/>
+                <a:ea typeface="Calibri"/>
+                <a:cs typeface="Calibri"/>
+              </a:rPr>
+              <a:t>јесте библиотека која знатно олакшава рад са меморијом код агената.</a:t>
+            </a:r>
+          </a:p>
+          <a:p>
+            <a:pPr marL="210000" indent="-210000">
+              <a:spcBef>
+                <a:spcPts val="1200"/>
               </a:spcBef>
               <a:spcAft>
                 <a:spcPts val="0"/>
